--- a/project/results/3-presentation/presentasi.pptx
+++ b/project/results/3-presentation/presentasi.pptx
@@ -3534,7 +3534,7 @@
               </a:defRPr>
             </a:pPr>
             <a:r>
-              <a:t>• Selisih 0,77 poin, 95% CI 0,60 s.d. 0,94, p &lt; 0,0001.</a:t>
+              <a:t>• Selisih 0,77 poin, 95% CI 0,59 s.d. 0,94, p &lt; 0,0001.</a:t>
             </a:r>
           </a:p>
           <a:p>
